--- a/docs/tfm-pitch-deck.pptx
+++ b/docs/tfm-pitch-deck.pptx
@@ -4,6 +4,9 @@
   <p:sldMasterIdLst>
     <p:sldMasterId id="2147483648" r:id="rId1"/>
   </p:sldMasterIdLst>
+  <p:notesMasterIdLst>
+    <p:notesMasterId r:id="rId11"/>
+  </p:notesMasterIdLst>
   <p:sldIdLst>
     <p:sldId id="256" r:id="rId2"/>
     <p:sldId id="257" r:id="rId3"/>
@@ -15,9 +18,6 @@
     <p:sldId id="263" r:id="rId9"/>
     <p:sldId id="264" r:id="rId10"/>
   </p:sldIdLst>
-  <p:notesMasterIdLst>
-    <p:notesMasterId r:id="rId11"/>
-  </p:notesMasterIdLst>
   <p:sldSz cx="12192000" cy="6858000"/>
   <p:notesSz cx="6858000" cy="12192000"/>
   <p:defaultTextStyle>
@@ -112,6 +112,11 @@
       </a:defRPr>
     </a:lvl9pPr>
   </p:defaultTextStyle>
+  <p:extLst>
+    <p:ext uri="{EFAFB233-063F-42B5-8137-9DF3F51BA10A}">
+      <p15:sldGuideLst xmlns:p15="http://schemas.microsoft.com/office/powerpoint/2012/main"/>
+    </p:ext>
+  </p:extLst>
 </p:presentation>
 </file>
 
@@ -137,234 +142,10 @@
           <a:chExt cx="0" cy="0"/>
         </a:xfrm>
       </p:grpSpPr>
-      <p:sp>
-        <p:nvSpPr>
-          <p:cNvPr id="2" name="Header Placeholder 1"/>
-          <p:cNvSpPr>
-            <a:spLocks noGrp="1"/>
-          </p:cNvSpPr>
-          <p:nvPr>
-            <p:ph type="hdr" sz="quarter"/>
-          </p:nvPr>
-        </p:nvSpPr>
-        <p:spPr>
-          <a:xfrm>
-            <a:off x="0" y="0"/>
-            <a:ext cx="2971800" cy="458788"/>
-          </a:xfrm>
-          <a:prstGeom prst="rect">
-            <a:avLst/>
-          </a:prstGeom>
-        </p:spPr>
-        <p:txBody>
-          <a:bodyPr vert="horz" lIns="91440" tIns="45720" rIns="91440" bIns="45720" rtlCol="0"/>
-          <a:lstStyle>
-            <a:lvl1pPr algn="l">
-              <a:defRPr sz="1200"/>
-            </a:lvl1pPr>
-          </a:lstStyle>
-          <a:p>
-            <a:endParaRPr lang="en-US"/>
-          </a:p>
-        </p:txBody>
-      </p:sp>
-      <p:sp>
-        <p:nvSpPr>
-          <p:cNvPr id="3" name="Date Placeholder 2"/>
-          <p:cNvSpPr>
-            <a:spLocks noGrp="1"/>
-          </p:cNvSpPr>
-          <p:nvPr>
-            <p:ph type="dt" idx="1"/>
-          </p:nvPr>
-        </p:nvSpPr>
-        <p:spPr>
-          <a:xfrm>
-            <a:off x="3884613" y="0"/>
-            <a:ext cx="2971800" cy="458788"/>
-          </a:xfrm>
-          <a:prstGeom prst="rect">
-            <a:avLst/>
-          </a:prstGeom>
-        </p:spPr>
-        <p:txBody>
-          <a:bodyPr vert="horz" lIns="91440" tIns="45720" rIns="91440" bIns="45720" rtlCol="0"/>
-          <a:lstStyle>
-            <a:lvl1pPr algn="r">
-              <a:defRPr sz="1200"/>
-            </a:lvl1pPr>
-          </a:lstStyle>
-          <a:p>
-            <a:fld id="{5282F153-3F37-0F45-9E97-73ACFA13230C}" type="datetimeFigureOut">
-              <a:rPr lang="en-US"/>
-              <a:t>7/23/19</a:t>
-            </a:fld>
-            <a:endParaRPr lang="en-US"/>
-          </a:p>
-        </p:txBody>
-      </p:sp>
-      <p:sp>
-        <p:nvSpPr>
-          <p:cNvPr id="4" name="Slide Image Placeholder 3"/>
-          <p:cNvSpPr>
-            <a:spLocks noGrp="1" noRot="1" noChangeAspect="1"/>
-          </p:cNvSpPr>
-          <p:nvPr>
-            <p:ph type="sldImg" idx="2"/>
-          </p:nvPr>
-        </p:nvSpPr>
-        <p:spPr>
-          <a:xfrm>
-            <a:off x="685800" y="1143000"/>
-            <a:ext cx="5486400" cy="3086100"/>
-          </a:xfrm>
-          <a:prstGeom prst="rect">
-            <a:avLst/>
-          </a:prstGeom>
-          <a:noFill/>
-          <a:ln w="12700">
-            <a:solidFill>
-              <a:prstClr val="black"/>
-            </a:solidFill>
-          </a:ln>
-        </p:spPr>
-        <p:txBody>
-          <a:bodyPr vert="horz" lIns="91440" tIns="45720" rIns="91440" bIns="45720" rtlCol="0" anchor="ctr"/>
-          <a:lstStyle/>
-          <a:p>
-            <a:endParaRPr lang="en-US"/>
-          </a:p>
-        </p:txBody>
-      </p:sp>
-      <p:sp>
-        <p:nvSpPr>
-          <p:cNvPr id="5" name="Notes Placeholder 4"/>
-          <p:cNvSpPr>
-            <a:spLocks noGrp="1"/>
-          </p:cNvSpPr>
-          <p:nvPr>
-            <p:ph type="body" sz="quarter" idx="3"/>
-          </p:nvPr>
-        </p:nvSpPr>
-        <p:spPr>
-          <a:xfrm>
-            <a:off x="685800" y="4400550"/>
-            <a:ext cx="5486400" cy="3600450"/>
-          </a:xfrm>
-          <a:prstGeom prst="rect">
-            <a:avLst/>
-          </a:prstGeom>
-        </p:spPr>
-        <p:txBody>
-          <a:bodyPr vert="horz" lIns="91440" tIns="45720" rIns="91440" bIns="45720" rtlCol="0"/>
-          <a:lstStyle/>
-          <a:p>
-            <a:pPr lvl="0"/>
-            <a:r>
-              <a:rPr lang="en-US"/>
-              <a:t>Click to edit Master text styles</a:t>
-            </a:r>
-          </a:p>
-          <a:p>
-            <a:pPr lvl="1"/>
-            <a:r>
-              <a:rPr lang="en-US"/>
-              <a:t>Second level</a:t>
-            </a:r>
-          </a:p>
-          <a:p>
-            <a:pPr lvl="2"/>
-            <a:r>
-              <a:rPr lang="en-US"/>
-              <a:t>Third level</a:t>
-            </a:r>
-          </a:p>
-          <a:p>
-            <a:pPr lvl="3"/>
-            <a:r>
-              <a:rPr lang="en-US"/>
-              <a:t>Fourth level</a:t>
-            </a:r>
-          </a:p>
-          <a:p>
-            <a:pPr lvl="4"/>
-            <a:r>
-              <a:rPr lang="en-US"/>
-              <a:t>Fifth level</a:t>
-            </a:r>
-          </a:p>
-        </p:txBody>
-      </p:sp>
-      <p:sp>
-        <p:nvSpPr>
-          <p:cNvPr id="6" name="Footer Placeholder 5"/>
-          <p:cNvSpPr>
-            <a:spLocks noGrp="1"/>
-          </p:cNvSpPr>
-          <p:nvPr>
-            <p:ph type="ftr" sz="quarter" idx="4"/>
-          </p:nvPr>
-        </p:nvSpPr>
-        <p:spPr>
-          <a:xfrm>
-            <a:off x="0" y="8685213"/>
-            <a:ext cx="2971800" cy="458787"/>
-          </a:xfrm>
-          <a:prstGeom prst="rect">
-            <a:avLst/>
-          </a:prstGeom>
-        </p:spPr>
-        <p:txBody>
-          <a:bodyPr vert="horz" lIns="91440" tIns="45720" rIns="91440" bIns="45720" rtlCol="0" anchor="b"/>
-          <a:lstStyle>
-            <a:lvl1pPr algn="l">
-              <a:defRPr sz="1200"/>
-            </a:lvl1pPr>
-          </a:lstStyle>
-          <a:p>
-            <a:endParaRPr lang="en-US"/>
-          </a:p>
-        </p:txBody>
-      </p:sp>
-      <p:sp>
-        <p:nvSpPr>
-          <p:cNvPr id="7" name="Slide Number Placeholder 6"/>
-          <p:cNvSpPr>
-            <a:spLocks noGrp="1"/>
-          </p:cNvSpPr>
-          <p:nvPr>
-            <p:ph type="sldNum" sz="quarter" idx="5"/>
-          </p:nvPr>
-        </p:nvSpPr>
-        <p:spPr>
-          <a:xfrm>
-            <a:off x="3884613" y="8685213"/>
-            <a:ext cx="2971800" cy="458787"/>
-          </a:xfrm>
-          <a:prstGeom prst="rect">
-            <a:avLst/>
-          </a:prstGeom>
-        </p:spPr>
-        <p:txBody>
-          <a:bodyPr vert="horz" lIns="91440" tIns="45720" rIns="91440" bIns="45720" rtlCol="0" anchor="b"/>
-          <a:lstStyle>
-            <a:lvl1pPr algn="r">
-              <a:defRPr sz="1200"/>
-            </a:lvl1pPr>
-          </a:lstStyle>
-          <a:p>
-            <a:fld id="{CE5E9CC1-C706-0F49-92D6-E571CC5EEA8F}" type="slidenum">
-              <a:rPr lang="en-US"/>
-              <a:t>‹#›</a:t>
-            </a:fld>
-            <a:endParaRPr lang="en-US"/>
-          </a:p>
-        </p:txBody>
-      </p:sp>
     </p:spTree>
     <p:extLst>
       <p:ext uri="{BB962C8B-B14F-4D97-AF65-F5344CB8AC3E}">
-        <p14:creationId xmlns:p14="http://schemas.microsoft.com/office/powerpoint/2010/main" val="1024086991"/>
+        <p14:creationId xmlns:p14="http://schemas.microsoft.com/office/powerpoint/2010/main" val="2366811134"/>
       </p:ext>
     </p:extLst>
   </p:cSld>
@@ -512,7 +293,6 @@
               <a:rPr lang="en-US" dirty="0"/>
               <a:t>Todo el tiempo cuenta. Una idea simple: el tiempo que las personas pasan en centros de cuidado puede convertirse en tiempo de vida. Hoy os cuento cómo.</a:t>
             </a:r>
-            <a:endParaRPr lang="en-US" dirty="0"/>
           </a:p>
         </p:txBody>
       </p:sp>
@@ -600,7 +380,6 @@
               <a:rPr lang="en-US" dirty="0"/>
               <a:t>Pensad en alguien ingresado, o en una residencia, o acompañando a un familiar. Se pasan horas larguísimas. Ese tiempo pesa, para quien lo vive y para quien acompaña. Pero no tiene por qué ser tiempo perdido.</a:t>
             </a:r>
-            <a:endParaRPr lang="en-US" dirty="0"/>
           </a:p>
         </p:txBody>
       </p:sp>
@@ -688,7 +467,6 @@
               <a:rPr lang="en-US" dirty="0"/>
               <a:t>La idea de fondo no es inventar la cultura en los centros. Es que sabemos que funciona: una actividad rompe la rutina, acompaña, devuelve dignidad al tiempo. La pregunta es cómo lograr que ocurra de verdad, y a menudo.</a:t>
             </a:r>
-            <a:endParaRPr lang="en-US" dirty="0"/>
           </a:p>
         </p:txBody>
       </p:sp>
@@ -776,7 +554,6 @@
               <a:rPr lang="en-US" dirty="0"/>
               <a:t>Aquí está el problema real. No falta gente con ganas: faltan las tuberías. Coordinar disponibilidad, propuestas, permisos y una comunicación segura es un lío, y en un entorno de salud hay datos delicados de por medio. Sin algo que lo ordene, la buena voluntad se pierde.</a:t>
             </a:r>
-            <a:endParaRPr lang="en-US" dirty="0"/>
           </a:p>
         </p:txBody>
       </p:sp>
@@ -864,7 +641,6 @@
               <a:rPr lang="en-US" dirty="0"/>
               <a:t>Todo el tiempo cuenta es la herramienta que faltaba. Conecta a los centros de cuidado con artistas dispuestos a aportar, y lo hace de forma simple y segura, pensada para cómo funciona de verdad un hospital o una residencia.</a:t>
             </a:r>
-            <a:endParaRPr lang="en-US" dirty="0"/>
           </a:p>
         </p:txBody>
       </p:sp>
@@ -952,7 +728,6 @@
               <a:rPr lang="en-US" dirty="0"/>
               <a:t>Cuatro pasos, en lenguaje de calle. El centro dice: tengo esta tarde libre. Varios artistas ofrecen actividades. El centro elige la que mejor encaja con sus personas, no la primera que llegó. Y esa actividad se convierte en un evento real que las familias pueden ver. Así de simple por fuera.</a:t>
             </a:r>
-            <a:endParaRPr lang="en-US" dirty="0"/>
           </a:p>
         </p:txBody>
       </p:sp>
@@ -1040,7 +815,6 @@
               <a:rPr lang="en-US" dirty="0"/>
               <a:t>Ayuda a tres grupos a la vez: a las personas, que reciben un rato de vida; a las familias, que ven que a su gente la acompañan; y a los artistas, que encuentran dónde aportar. Y no es solo para hospitales: sirve para seis tipos de centro de cuidado.</a:t>
             </a:r>
-            <a:endParaRPr lang="en-US" dirty="0"/>
           </a:p>
         </p:txBody>
       </p:sp>
@@ -1128,7 +902,6 @@
               <a:rPr lang="en-US" dirty="0"/>
               <a:t>Tres cosas lo hacen distinto. Primero, el centro elige: no premia a quien llega antes, sino a lo que mejor encaja con sus personas. Segundo, respeta la privacidad y la dignidad, algo básico en salud. Y tercero, no busca lucro: busca bienestar.</a:t>
             </a:r>
-            <a:endParaRPr lang="en-US" dirty="0"/>
           </a:p>
         </p:txBody>
       </p:sp>
@@ -1216,7 +989,6 @@
               <a:rPr lang="en-US" dirty="0"/>
               <a:t>Y lo más importante: esto no es una maqueta ni un powerpoint. Es una plataforma real, funcionando hoy, lista para llevar más vida a más centros. Porque al final la idea cabe en una frase: convertir tiempo de espera en tiempo de vida, a escala. Gracias.</a:t>
             </a:r>
-            <a:endParaRPr lang="en-US" dirty="0"/>
           </a:p>
         </p:txBody>
       </p:sp>
@@ -1289,6 +1061,11 @@
 <file path=ppt/slideMasters/slideMaster1.xml><?xml version="1.0" encoding="utf-8"?>
 <p:sldMaster xmlns:a="http://schemas.openxmlformats.org/drawingml/2006/main" xmlns:r="http://schemas.openxmlformats.org/officeDocument/2006/relationships" xmlns:p="http://schemas.openxmlformats.org/presentationml/2006/main">
   <p:cSld>
+    <p:bg>
+      <p:bgRef idx="1001">
+        <a:schemeClr val="bg1"/>
+      </p:bgRef>
+    </p:bg>
     <p:spTree>
       <p:nvGrpSpPr>
         <p:cNvPr id="1" name=""/>
@@ -1571,6 +1348,7 @@
         <a:solidFill>
           <a:srgbClr val="2A2432"/>
         </a:solidFill>
+        <a:effectLst/>
       </p:bgPr>
     </p:bg>
     <p:spTree>
@@ -1606,6 +1384,13 @@
           </a:solidFill>
           <a:ln/>
         </p:spPr>
+        <p:txBody>
+          <a:bodyPr/>
+          <a:lstStyle/>
+          <a:p>
+            <a:endParaRPr lang="es-ES"/>
+          </a:p>
+        </p:txBody>
       </p:sp>
       <p:sp>
         <p:nvSpPr>
@@ -1628,7 +1413,7 @@
           <a:bodyPr wrap="square" lIns="0" tIns="0" rIns="0" bIns="0" rtlCol="0" anchor="ctr"/>
           <a:lstStyle/>
           <a:p>
-            <a:pPr indent="0" marL="0">
+            <a:pPr marL="0" indent="0">
               <a:buNone/>
             </a:pPr>
             <a:r>
@@ -1667,7 +1452,7 @@
           <a:bodyPr wrap="square" lIns="0" tIns="0" rIns="0" bIns="0" rtlCol="0" anchor="ctr"/>
           <a:lstStyle/>
           <a:p>
-            <a:pPr indent="0" marL="0">
+            <a:pPr marL="0" indent="0">
               <a:buNone/>
             </a:pPr>
             <a:r>
@@ -1706,7 +1491,7 @@
           <a:bodyPr wrap="square" lIns="0" tIns="0" rIns="0" bIns="0" rtlCol="0" anchor="ctr"/>
           <a:lstStyle/>
           <a:p>
-            <a:pPr indent="0" marL="0">
+            <a:pPr marL="0" indent="0">
               <a:lnSpc>
                 <a:spcPct val="115000"/>
               </a:lnSpc>
@@ -1748,7 +1533,7 @@
           <a:bodyPr wrap="square" lIns="0" tIns="0" rIns="0" bIns="0" rtlCol="0" anchor="ctr"/>
           <a:lstStyle/>
           <a:p>
-            <a:pPr indent="0" marL="0">
+            <a:pPr marL="0" indent="0">
               <a:buNone/>
             </a:pPr>
             <a:r>
@@ -1760,7 +1545,51 @@
                 <a:ea typeface="Calibri" pitchFamily="34" charset="-122"/>
                 <a:cs typeface="Calibri" pitchFamily="34" charset="-120"/>
               </a:rPr>
-              <a:t>[AUTOR] · Presentación del proyecto</a:t>
+              <a:t>[Koldobika Legorburu Segurola · Master </a:t>
+            </a:r>
+            <a:r>
+              <a:rPr lang="en-US" sz="1250" i="1" dirty="0" err="1">
+                <a:solidFill>
+                  <a:srgbClr val="9C93A6"/>
+                </a:solidFill>
+                <a:latin typeface="Calibri" pitchFamily="34" charset="0"/>
+                <a:ea typeface="Calibri" pitchFamily="34" charset="-122"/>
+                <a:cs typeface="Calibri" pitchFamily="34" charset="-120"/>
+              </a:rPr>
+              <a:t>en</a:t>
+            </a:r>
+            <a:r>
+              <a:rPr lang="en-US" sz="1250" i="1" dirty="0">
+                <a:solidFill>
+                  <a:srgbClr val="9C93A6"/>
+                </a:solidFill>
+                <a:latin typeface="Calibri" pitchFamily="34" charset="0"/>
+                <a:ea typeface="Calibri" pitchFamily="34" charset="-122"/>
+                <a:cs typeface="Calibri" pitchFamily="34" charset="-120"/>
+              </a:rPr>
+              <a:t> </a:t>
+            </a:r>
+            <a:r>
+              <a:rPr lang="en-US" sz="1250" i="1" dirty="0" err="1">
+                <a:solidFill>
+                  <a:srgbClr val="9C93A6"/>
+                </a:solidFill>
+                <a:latin typeface="Calibri" pitchFamily="34" charset="0"/>
+                <a:ea typeface="Calibri" pitchFamily="34" charset="-122"/>
+                <a:cs typeface="Calibri" pitchFamily="34" charset="-120"/>
+              </a:rPr>
+              <a:t>desarrollo</a:t>
+            </a:r>
+            <a:r>
+              <a:rPr lang="en-US" sz="1250" i="1" dirty="0">
+                <a:solidFill>
+                  <a:srgbClr val="9C93A6"/>
+                </a:solidFill>
+                <a:latin typeface="Calibri" pitchFamily="34" charset="0"/>
+                <a:ea typeface="Calibri" pitchFamily="34" charset="-122"/>
+                <a:cs typeface="Calibri" pitchFamily="34" charset="-120"/>
+              </a:rPr>
+              <a:t> con IA (ed. II) Big School. Presentación del Proyecto.</a:t>
             </a:r>
             <a:endParaRPr lang="en-US" sz="1250" dirty="0"/>
           </a:p>
@@ -1782,6 +1611,7 @@
         <a:solidFill>
           <a:srgbClr val="FBF6EE"/>
         </a:solidFill>
+        <a:effectLst/>
       </p:bgPr>
     </p:bg>
     <p:spTree>
@@ -1819,7 +1649,7 @@
           <a:bodyPr wrap="square" lIns="0" tIns="0" rIns="0" bIns="0" rtlCol="0" anchor="ctr"/>
           <a:lstStyle/>
           <a:p>
-            <a:pPr indent="0" marL="0">
+            <a:pPr marL="0" indent="0">
               <a:lnSpc>
                 <a:spcPct val="105000"/>
               </a:lnSpc>
@@ -1839,7 +1669,7 @@
             <a:endParaRPr lang="en-US" sz="3800" dirty="0"/>
           </a:p>
           <a:p>
-            <a:pPr indent="0" marL="0">
+            <a:pPr marL="0" indent="0">
               <a:lnSpc>
                 <a:spcPct val="105000"/>
               </a:lnSpc>
@@ -1881,7 +1711,7 @@
           <a:bodyPr wrap="square" lIns="0" tIns="0" rIns="0" bIns="0" rtlCol="0" anchor="ctr"/>
           <a:lstStyle/>
           <a:p>
-            <a:pPr indent="0" marL="0">
+            <a:pPr marL="0" indent="0">
               <a:lnSpc>
                 <a:spcPct val="120000"/>
               </a:lnSpc>
@@ -1923,6 +1753,13 @@
           </a:solidFill>
           <a:ln/>
         </p:spPr>
+        <p:txBody>
+          <a:bodyPr/>
+          <a:lstStyle/>
+          <a:p>
+            <a:endParaRPr lang="es-ES"/>
+          </a:p>
+        </p:txBody>
       </p:sp>
       <p:sp>
         <p:nvSpPr>
@@ -1945,7 +1782,7 @@
           <a:bodyPr wrap="square" lIns="0" tIns="0" rIns="0" bIns="0" rtlCol="0" anchor="ctr"/>
           <a:lstStyle/>
           <a:p>
-            <a:pPr indent="0" marL="0">
+            <a:pPr marL="0" indent="0">
               <a:lnSpc>
                 <a:spcPct val="105000"/>
               </a:lnSpc>
@@ -1962,12 +1799,6 @@
               </a:rPr>
               <a:t>Ese tiempo no tiene por qué ser tiempo perdido. </a:t>
             </a:r>
-            <a:pPr indent="0" marL="0">
-              <a:lnSpc>
-                <a:spcPct val="105000"/>
-              </a:lnSpc>
-              <a:buNone/>
-            </a:pPr>
             <a:r>
               <a:rPr lang="en-US" sz="1700" dirty="0">
                 <a:solidFill>
@@ -2004,11 +1835,11 @@
           <a:bodyPr wrap="square" lIns="0" tIns="0" rIns="0" bIns="0" rtlCol="0" anchor="ctr"/>
           <a:lstStyle/>
           <a:p>
-            <a:pPr indent="0" marL="0">
-              <a:buNone/>
-            </a:pPr>
-            <a:r>
-              <a:rPr lang="en-US" sz="1000" b="1" spc="300" kern="0" dirty="0">
+            <a:pPr marL="0" indent="0">
+              <a:buNone/>
+            </a:pPr>
+            <a:r>
+              <a:rPr lang="en-US" sz="1000" b="1" kern="0" spc="300" dirty="0">
                 <a:solidFill>
                   <a:srgbClr val="8C8279"/>
                 </a:solidFill>
@@ -2043,7 +1874,7 @@
           <a:bodyPr wrap="square" rtlCol="0" anchor="ctr"/>
           <a:lstStyle/>
           <a:p>
-            <a:pPr algn="r" indent="0" marL="0">
+            <a:pPr marL="0" indent="0" algn="r">
               <a:buNone/>
             </a:pPr>
             <a:r>
@@ -2077,6 +1908,7 @@
         <a:solidFill>
           <a:srgbClr val="FBF6EE"/>
         </a:solidFill>
+        <a:effectLst/>
       </p:bgPr>
     </p:bg>
     <p:spTree>
@@ -2114,7 +1946,7 @@
           <a:bodyPr wrap="square" lIns="0" tIns="0" rIns="0" bIns="0" rtlCol="0" anchor="ctr"/>
           <a:lstStyle/>
           <a:p>
-            <a:pPr indent="0" marL="0">
+            <a:pPr marL="0" indent="0">
               <a:buNone/>
             </a:pPr>
             <a:r>
@@ -2153,7 +1985,7 @@
           <a:bodyPr wrap="square" lIns="0" tIns="0" rIns="0" bIns="0" rtlCol="0" anchor="ctr"/>
           <a:lstStyle/>
           <a:p>
-            <a:pPr indent="0" marL="0">
+            <a:pPr marL="0" indent="0">
               <a:lnSpc>
                 <a:spcPct val="115000"/>
               </a:lnSpc>
@@ -2195,13 +2027,20 @@
           </a:solidFill>
           <a:ln/>
           <a:effectLst>
-            <a:outerShdw sx="100000" sy="100000" kx="0" ky="0" algn="bl" rotWithShape="0" blurRad="114300" dist="38100" dir="5400000">
+            <a:outerShdw blurRad="114300" dist="38100" dir="5400000" algn="bl" rotWithShape="0">
               <a:srgbClr val="C9BEAF">
                 <a:alpha val="30000"/>
               </a:srgbClr>
             </a:outerShdw>
           </a:effectLst>
         </p:spPr>
+        <p:txBody>
+          <a:bodyPr/>
+          <a:lstStyle/>
+          <a:p>
+            <a:endParaRPr lang="es-ES"/>
+          </a:p>
+        </p:txBody>
       </p:sp>
       <p:sp>
         <p:nvSpPr>
@@ -2222,6 +2061,13 @@
           </a:solidFill>
           <a:ln/>
         </p:spPr>
+        <p:txBody>
+          <a:bodyPr/>
+          <a:lstStyle/>
+          <a:p>
+            <a:endParaRPr lang="es-ES"/>
+          </a:p>
+        </p:txBody>
       </p:sp>
       <p:sp>
         <p:nvSpPr>
@@ -2244,7 +2090,7 @@
           <a:bodyPr wrap="square" lIns="0" tIns="0" rIns="0" bIns="0" rtlCol="0" anchor="ctr"/>
           <a:lstStyle/>
           <a:p>
-            <a:pPr indent="0" marL="0">
+            <a:pPr marL="0" indent="0">
               <a:buNone/>
             </a:pPr>
             <a:r>
@@ -2283,7 +2129,7 @@
           <a:bodyPr wrap="square" lIns="0" tIns="0" rIns="0" bIns="0" rtlCol="0" anchor="ctr"/>
           <a:lstStyle/>
           <a:p>
-            <a:pPr indent="0" marL="0">
+            <a:pPr marL="0" indent="0">
               <a:lnSpc>
                 <a:spcPct val="105000"/>
               </a:lnSpc>
@@ -2325,13 +2171,20 @@
           </a:solidFill>
           <a:ln/>
           <a:effectLst>
-            <a:outerShdw sx="100000" sy="100000" kx="0" ky="0" algn="bl" rotWithShape="0" blurRad="114300" dist="38100" dir="5400000">
+            <a:outerShdw blurRad="114300" dist="38100" dir="5400000" algn="bl" rotWithShape="0">
               <a:srgbClr val="C9BEAF">
                 <a:alpha val="30000"/>
               </a:srgbClr>
             </a:outerShdw>
           </a:effectLst>
         </p:spPr>
+        <p:txBody>
+          <a:bodyPr/>
+          <a:lstStyle/>
+          <a:p>
+            <a:endParaRPr lang="es-ES"/>
+          </a:p>
+        </p:txBody>
       </p:sp>
       <p:sp>
         <p:nvSpPr>
@@ -2352,6 +2205,13 @@
           </a:solidFill>
           <a:ln/>
         </p:spPr>
+        <p:txBody>
+          <a:bodyPr/>
+          <a:lstStyle/>
+          <a:p>
+            <a:endParaRPr lang="es-ES"/>
+          </a:p>
+        </p:txBody>
       </p:sp>
       <p:sp>
         <p:nvSpPr>
@@ -2374,7 +2234,7 @@
           <a:bodyPr wrap="square" lIns="0" tIns="0" rIns="0" bIns="0" rtlCol="0" anchor="ctr"/>
           <a:lstStyle/>
           <a:p>
-            <a:pPr indent="0" marL="0">
+            <a:pPr marL="0" indent="0">
               <a:buNone/>
             </a:pPr>
             <a:r>
@@ -2413,7 +2273,7 @@
           <a:bodyPr wrap="square" lIns="0" tIns="0" rIns="0" bIns="0" rtlCol="0" anchor="ctr"/>
           <a:lstStyle/>
           <a:p>
-            <a:pPr indent="0" marL="0">
+            <a:pPr marL="0" indent="0">
               <a:lnSpc>
                 <a:spcPct val="105000"/>
               </a:lnSpc>
@@ -2455,13 +2315,20 @@
           </a:solidFill>
           <a:ln/>
           <a:effectLst>
-            <a:outerShdw sx="100000" sy="100000" kx="0" ky="0" algn="bl" rotWithShape="0" blurRad="114300" dist="38100" dir="5400000">
+            <a:outerShdw blurRad="114300" dist="38100" dir="5400000" algn="bl" rotWithShape="0">
               <a:srgbClr val="C9BEAF">
                 <a:alpha val="30000"/>
               </a:srgbClr>
             </a:outerShdw>
           </a:effectLst>
         </p:spPr>
+        <p:txBody>
+          <a:bodyPr/>
+          <a:lstStyle/>
+          <a:p>
+            <a:endParaRPr lang="es-ES"/>
+          </a:p>
+        </p:txBody>
       </p:sp>
       <p:sp>
         <p:nvSpPr>
@@ -2482,6 +2349,13 @@
           </a:solidFill>
           <a:ln/>
         </p:spPr>
+        <p:txBody>
+          <a:bodyPr/>
+          <a:lstStyle/>
+          <a:p>
+            <a:endParaRPr lang="es-ES"/>
+          </a:p>
+        </p:txBody>
       </p:sp>
       <p:sp>
         <p:nvSpPr>
@@ -2504,7 +2378,7 @@
           <a:bodyPr wrap="square" lIns="0" tIns="0" rIns="0" bIns="0" rtlCol="0" anchor="ctr"/>
           <a:lstStyle/>
           <a:p>
-            <a:pPr indent="0" marL="0">
+            <a:pPr marL="0" indent="0">
               <a:buNone/>
             </a:pPr>
             <a:r>
@@ -2543,7 +2417,7 @@
           <a:bodyPr wrap="square" lIns="0" tIns="0" rIns="0" bIns="0" rtlCol="0" anchor="ctr"/>
           <a:lstStyle/>
           <a:p>
-            <a:pPr indent="0" marL="0">
+            <a:pPr marL="0" indent="0">
               <a:lnSpc>
                 <a:spcPct val="105000"/>
               </a:lnSpc>
@@ -2585,11 +2459,11 @@
           <a:bodyPr wrap="square" lIns="0" tIns="0" rIns="0" bIns="0" rtlCol="0" anchor="ctr"/>
           <a:lstStyle/>
           <a:p>
-            <a:pPr indent="0" marL="0">
-              <a:buNone/>
-            </a:pPr>
-            <a:r>
-              <a:rPr lang="en-US" sz="1000" b="1" spc="300" kern="0" dirty="0">
+            <a:pPr marL="0" indent="0">
+              <a:buNone/>
+            </a:pPr>
+            <a:r>
+              <a:rPr lang="en-US" sz="1000" b="1" kern="0" spc="300" dirty="0">
                 <a:solidFill>
                   <a:srgbClr val="8C8279"/>
                 </a:solidFill>
@@ -2624,7 +2498,7 @@
           <a:bodyPr wrap="square" rtlCol="0" anchor="ctr"/>
           <a:lstStyle/>
           <a:p>
-            <a:pPr algn="r" indent="0" marL="0">
+            <a:pPr marL="0" indent="0" algn="r">
               <a:buNone/>
             </a:pPr>
             <a:r>
@@ -2658,6 +2532,7 @@
         <a:solidFill>
           <a:srgbClr val="FBF6EE"/>
         </a:solidFill>
+        <a:effectLst/>
       </p:bgPr>
     </p:bg>
     <p:spTree>
@@ -2695,7 +2570,7 @@
           <a:bodyPr wrap="square" lIns="0" tIns="0" rIns="0" bIns="0" rtlCol="0" anchor="ctr"/>
           <a:lstStyle/>
           <a:p>
-            <a:pPr indent="0" marL="0">
+            <a:pPr marL="0" indent="0">
               <a:lnSpc>
                 <a:spcPct val="105000"/>
               </a:lnSpc>
@@ -2715,7 +2590,7 @@
             <a:endParaRPr lang="en-US" sz="3800" dirty="0"/>
           </a:p>
           <a:p>
-            <a:pPr indent="0" marL="0">
+            <a:pPr marL="0" indent="0">
               <a:lnSpc>
                 <a:spcPct val="105000"/>
               </a:lnSpc>
@@ -2757,7 +2632,7 @@
           <a:bodyPr wrap="square" lIns="0" tIns="0" rIns="0" bIns="0" rtlCol="0" anchor="ctr"/>
           <a:lstStyle/>
           <a:p>
-            <a:pPr indent="0" marL="0">
+            <a:pPr marL="0" indent="0">
               <a:lnSpc>
                 <a:spcPct val="120000"/>
               </a:lnSpc>
@@ -2799,6 +2674,13 @@
           </a:solidFill>
           <a:ln/>
         </p:spPr>
+        <p:txBody>
+          <a:bodyPr/>
+          <a:lstStyle/>
+          <a:p>
+            <a:endParaRPr lang="es-ES"/>
+          </a:p>
+        </p:txBody>
       </p:sp>
       <p:sp>
         <p:nvSpPr>
@@ -2821,7 +2703,7 @@
           <a:bodyPr wrap="square" lIns="0" tIns="0" rIns="0" bIns="0" rtlCol="0" anchor="ctr"/>
           <a:lstStyle/>
           <a:p>
-            <a:pPr indent="0" marL="0">
+            <a:pPr marL="0" indent="0">
               <a:buNone/>
             </a:pPr>
             <a:r>
@@ -2835,9 +2717,6 @@
               </a:rPr>
               <a:t>Sin una herramienta que lo ordene, </a:t>
             </a:r>
-            <a:pPr indent="0" marL="0">
-              <a:buNone/>
-            </a:pPr>
             <a:r>
               <a:rPr lang="en-US" sz="1800" b="1" dirty="0">
                 <a:solidFill>
@@ -2874,11 +2753,11 @@
           <a:bodyPr wrap="square" lIns="0" tIns="0" rIns="0" bIns="0" rtlCol="0" anchor="ctr"/>
           <a:lstStyle/>
           <a:p>
-            <a:pPr indent="0" marL="0">
-              <a:buNone/>
-            </a:pPr>
-            <a:r>
-              <a:rPr lang="en-US" sz="1000" b="1" spc="300" kern="0" dirty="0">
+            <a:pPr marL="0" indent="0">
+              <a:buNone/>
+            </a:pPr>
+            <a:r>
+              <a:rPr lang="en-US" sz="1000" b="1" kern="0" spc="300" dirty="0">
                 <a:solidFill>
                   <a:srgbClr val="8C8279"/>
                 </a:solidFill>
@@ -2913,7 +2792,7 @@
           <a:bodyPr wrap="square" rtlCol="0" anchor="ctr"/>
           <a:lstStyle/>
           <a:p>
-            <a:pPr algn="r" indent="0" marL="0">
+            <a:pPr marL="0" indent="0" algn="r">
               <a:buNone/>
             </a:pPr>
             <a:r>
@@ -2947,6 +2826,7 @@
         <a:solidFill>
           <a:srgbClr val="2A2432"/>
         </a:solidFill>
+        <a:effectLst/>
       </p:bgPr>
     </p:bg>
     <p:spTree>
@@ -2982,6 +2862,13 @@
           </a:solidFill>
           <a:ln/>
         </p:spPr>
+        <p:txBody>
+          <a:bodyPr/>
+          <a:lstStyle/>
+          <a:p>
+            <a:endParaRPr lang="es-ES"/>
+          </a:p>
+        </p:txBody>
       </p:sp>
       <p:sp>
         <p:nvSpPr>
@@ -3004,11 +2891,11 @@
           <a:bodyPr wrap="square" lIns="0" tIns="0" rIns="0" bIns="0" rtlCol="0" anchor="ctr"/>
           <a:lstStyle/>
           <a:p>
-            <a:pPr indent="0" marL="0">
-              <a:buNone/>
-            </a:pPr>
-            <a:r>
-              <a:rPr lang="en-US" sz="1500" b="1" spc="200" kern="0" dirty="0">
+            <a:pPr marL="0" indent="0">
+              <a:buNone/>
+            </a:pPr>
+            <a:r>
+              <a:rPr lang="en-US" sz="1500" b="1" kern="0" spc="200" dirty="0">
                 <a:solidFill>
                   <a:srgbClr val="E0A24A"/>
                 </a:solidFill>
@@ -3043,7 +2930,7 @@
           <a:bodyPr wrap="square" lIns="0" tIns="0" rIns="0" bIns="0" rtlCol="0" anchor="ctr"/>
           <a:lstStyle/>
           <a:p>
-            <a:pPr indent="0" marL="0">
+            <a:pPr marL="0" indent="0">
               <a:lnSpc>
                 <a:spcPct val="108000"/>
               </a:lnSpc>
@@ -3085,7 +2972,7 @@
           <a:bodyPr wrap="square" lIns="0" tIns="0" rIns="0" bIns="0" rtlCol="0" anchor="ctr"/>
           <a:lstStyle/>
           <a:p>
-            <a:pPr indent="0" marL="0">
+            <a:pPr marL="0" indent="0">
               <a:buNone/>
             </a:pPr>
             <a:r>
@@ -3124,11 +3011,11 @@
           <a:bodyPr wrap="square" lIns="0" tIns="0" rIns="0" bIns="0" rtlCol="0" anchor="ctr"/>
           <a:lstStyle/>
           <a:p>
-            <a:pPr indent="0" marL="0">
-              <a:buNone/>
-            </a:pPr>
-            <a:r>
-              <a:rPr lang="en-US" sz="1000" b="1" spc="300" kern="0" dirty="0">
+            <a:pPr marL="0" indent="0">
+              <a:buNone/>
+            </a:pPr>
+            <a:r>
+              <a:rPr lang="en-US" sz="1000" b="1" kern="0" spc="300" dirty="0">
                 <a:solidFill>
                   <a:srgbClr val="9C93A6"/>
                 </a:solidFill>
@@ -3163,7 +3050,7 @@
           <a:bodyPr wrap="square" rtlCol="0" anchor="ctr"/>
           <a:lstStyle/>
           <a:p>
-            <a:pPr algn="r" indent="0" marL="0">
+            <a:pPr marL="0" indent="0" algn="r">
               <a:buNone/>
             </a:pPr>
             <a:r>
@@ -3197,6 +3084,7 @@
         <a:solidFill>
           <a:srgbClr val="FBF6EE"/>
         </a:solidFill>
+        <a:effectLst/>
       </p:bgPr>
     </p:bg>
     <p:spTree>
@@ -3234,7 +3122,7 @@
           <a:bodyPr wrap="square" lIns="0" tIns="0" rIns="0" bIns="0" rtlCol="0" anchor="ctr"/>
           <a:lstStyle/>
           <a:p>
-            <a:pPr indent="0" marL="0">
+            <a:pPr marL="0" indent="0">
               <a:buNone/>
             </a:pPr>
             <a:r>
@@ -3273,13 +3161,20 @@
           </a:solidFill>
           <a:ln/>
           <a:effectLst>
-            <a:outerShdw sx="100000" sy="100000" kx="0" ky="0" algn="bl" rotWithShape="0" blurRad="114300" dist="38100" dir="5400000">
+            <a:outerShdw blurRad="114300" dist="38100" dir="5400000" algn="bl" rotWithShape="0">
               <a:srgbClr val="C9BEAF">
                 <a:alpha val="30000"/>
               </a:srgbClr>
             </a:outerShdw>
           </a:effectLst>
         </p:spPr>
+        <p:txBody>
+          <a:bodyPr/>
+          <a:lstStyle/>
+          <a:p>
+            <a:endParaRPr lang="es-ES"/>
+          </a:p>
+        </p:txBody>
       </p:sp>
       <p:sp>
         <p:nvSpPr>
@@ -3300,6 +3195,13 @@
           </a:solidFill>
           <a:ln/>
         </p:spPr>
+        <p:txBody>
+          <a:bodyPr/>
+          <a:lstStyle/>
+          <a:p>
+            <a:endParaRPr lang="es-ES"/>
+          </a:p>
+        </p:txBody>
       </p:sp>
       <p:sp>
         <p:nvSpPr>
@@ -3322,7 +3224,7 @@
           <a:bodyPr wrap="square" lIns="0" tIns="0" rIns="0" bIns="0" rtlCol="0" anchor="ctr"/>
           <a:lstStyle/>
           <a:p>
-            <a:pPr algn="ctr" indent="0" marL="0">
+            <a:pPr marL="0" indent="0" algn="ctr">
               <a:buNone/>
             </a:pPr>
             <a:r>
@@ -3361,7 +3263,7 @@
           <a:bodyPr wrap="square" lIns="0" tIns="0" rIns="0" bIns="0" rtlCol="0" anchor="ctr"/>
           <a:lstStyle/>
           <a:p>
-            <a:pPr indent="0" marL="0">
+            <a:pPr marL="0" indent="0">
               <a:buNone/>
             </a:pPr>
             <a:r>
@@ -3400,7 +3302,7 @@
           <a:bodyPr wrap="square" lIns="0" tIns="0" rIns="0" bIns="0" rtlCol="0" anchor="ctr"/>
           <a:lstStyle/>
           <a:p>
-            <a:pPr indent="0" marL="0">
+            <a:pPr marL="0" indent="0">
               <a:lnSpc>
                 <a:spcPct val="105000"/>
               </a:lnSpc>
@@ -3442,13 +3344,20 @@
           </a:solidFill>
           <a:ln/>
           <a:effectLst>
-            <a:outerShdw sx="100000" sy="100000" kx="0" ky="0" algn="bl" rotWithShape="0" blurRad="114300" dist="38100" dir="5400000">
+            <a:outerShdw blurRad="114300" dist="38100" dir="5400000" algn="bl" rotWithShape="0">
               <a:srgbClr val="C9BEAF">
                 <a:alpha val="30000"/>
               </a:srgbClr>
             </a:outerShdw>
           </a:effectLst>
         </p:spPr>
+        <p:txBody>
+          <a:bodyPr/>
+          <a:lstStyle/>
+          <a:p>
+            <a:endParaRPr lang="es-ES"/>
+          </a:p>
+        </p:txBody>
       </p:sp>
       <p:sp>
         <p:nvSpPr>
@@ -3469,6 +3378,13 @@
           </a:solidFill>
           <a:ln/>
         </p:spPr>
+        <p:txBody>
+          <a:bodyPr/>
+          <a:lstStyle/>
+          <a:p>
+            <a:endParaRPr lang="es-ES"/>
+          </a:p>
+        </p:txBody>
       </p:sp>
       <p:sp>
         <p:nvSpPr>
@@ -3491,7 +3407,7 @@
           <a:bodyPr wrap="square" lIns="0" tIns="0" rIns="0" bIns="0" rtlCol="0" anchor="ctr"/>
           <a:lstStyle/>
           <a:p>
-            <a:pPr algn="ctr" indent="0" marL="0">
+            <a:pPr marL="0" indent="0" algn="ctr">
               <a:buNone/>
             </a:pPr>
             <a:r>
@@ -3530,7 +3446,7 @@
           <a:bodyPr wrap="square" lIns="0" tIns="0" rIns="0" bIns="0" rtlCol="0" anchor="ctr"/>
           <a:lstStyle/>
           <a:p>
-            <a:pPr indent="0" marL="0">
+            <a:pPr marL="0" indent="0">
               <a:buNone/>
             </a:pPr>
             <a:r>
@@ -3569,7 +3485,7 @@
           <a:bodyPr wrap="square" lIns="0" tIns="0" rIns="0" bIns="0" rtlCol="0" anchor="ctr"/>
           <a:lstStyle/>
           <a:p>
-            <a:pPr indent="0" marL="0">
+            <a:pPr marL="0" indent="0">
               <a:lnSpc>
                 <a:spcPct val="105000"/>
               </a:lnSpc>
@@ -3611,13 +3527,20 @@
           </a:solidFill>
           <a:ln/>
           <a:effectLst>
-            <a:outerShdw sx="100000" sy="100000" kx="0" ky="0" algn="bl" rotWithShape="0" blurRad="114300" dist="38100" dir="5400000">
+            <a:outerShdw blurRad="114300" dist="38100" dir="5400000" algn="bl" rotWithShape="0">
               <a:srgbClr val="C9BEAF">
                 <a:alpha val="30000"/>
               </a:srgbClr>
             </a:outerShdw>
           </a:effectLst>
         </p:spPr>
+        <p:txBody>
+          <a:bodyPr/>
+          <a:lstStyle/>
+          <a:p>
+            <a:endParaRPr lang="es-ES"/>
+          </a:p>
+        </p:txBody>
       </p:sp>
       <p:sp>
         <p:nvSpPr>
@@ -3638,6 +3561,13 @@
           </a:solidFill>
           <a:ln/>
         </p:spPr>
+        <p:txBody>
+          <a:bodyPr/>
+          <a:lstStyle/>
+          <a:p>
+            <a:endParaRPr lang="es-ES"/>
+          </a:p>
+        </p:txBody>
       </p:sp>
       <p:sp>
         <p:nvSpPr>
@@ -3660,7 +3590,7 @@
           <a:bodyPr wrap="square" lIns="0" tIns="0" rIns="0" bIns="0" rtlCol="0" anchor="ctr"/>
           <a:lstStyle/>
           <a:p>
-            <a:pPr algn="ctr" indent="0" marL="0">
+            <a:pPr marL="0" indent="0" algn="ctr">
               <a:buNone/>
             </a:pPr>
             <a:r>
@@ -3699,7 +3629,7 @@
           <a:bodyPr wrap="square" lIns="0" tIns="0" rIns="0" bIns="0" rtlCol="0" anchor="ctr"/>
           <a:lstStyle/>
           <a:p>
-            <a:pPr indent="0" marL="0">
+            <a:pPr marL="0" indent="0">
               <a:buNone/>
             </a:pPr>
             <a:r>
@@ -3738,7 +3668,7 @@
           <a:bodyPr wrap="square" lIns="0" tIns="0" rIns="0" bIns="0" rtlCol="0" anchor="ctr"/>
           <a:lstStyle/>
           <a:p>
-            <a:pPr indent="0" marL="0">
+            <a:pPr marL="0" indent="0">
               <a:lnSpc>
                 <a:spcPct val="105000"/>
               </a:lnSpc>
@@ -3780,13 +3710,20 @@
           </a:solidFill>
           <a:ln/>
           <a:effectLst>
-            <a:outerShdw sx="100000" sy="100000" kx="0" ky="0" algn="bl" rotWithShape="0" blurRad="114300" dist="38100" dir="5400000">
+            <a:outerShdw blurRad="114300" dist="38100" dir="5400000" algn="bl" rotWithShape="0">
               <a:srgbClr val="C9BEAF">
                 <a:alpha val="30000"/>
               </a:srgbClr>
             </a:outerShdw>
           </a:effectLst>
         </p:spPr>
+        <p:txBody>
+          <a:bodyPr/>
+          <a:lstStyle/>
+          <a:p>
+            <a:endParaRPr lang="es-ES"/>
+          </a:p>
+        </p:txBody>
       </p:sp>
       <p:sp>
         <p:nvSpPr>
@@ -3807,6 +3744,13 @@
           </a:solidFill>
           <a:ln/>
         </p:spPr>
+        <p:txBody>
+          <a:bodyPr/>
+          <a:lstStyle/>
+          <a:p>
+            <a:endParaRPr lang="es-ES"/>
+          </a:p>
+        </p:txBody>
       </p:sp>
       <p:sp>
         <p:nvSpPr>
@@ -3829,7 +3773,7 @@
           <a:bodyPr wrap="square" lIns="0" tIns="0" rIns="0" bIns="0" rtlCol="0" anchor="ctr"/>
           <a:lstStyle/>
           <a:p>
-            <a:pPr algn="ctr" indent="0" marL="0">
+            <a:pPr marL="0" indent="0" algn="ctr">
               <a:buNone/>
             </a:pPr>
             <a:r>
@@ -3868,7 +3812,7 @@
           <a:bodyPr wrap="square" lIns="0" tIns="0" rIns="0" bIns="0" rtlCol="0" anchor="ctr"/>
           <a:lstStyle/>
           <a:p>
-            <a:pPr indent="0" marL="0">
+            <a:pPr marL="0" indent="0">
               <a:buNone/>
             </a:pPr>
             <a:r>
@@ -3907,7 +3851,7 @@
           <a:bodyPr wrap="square" lIns="0" tIns="0" rIns="0" bIns="0" rtlCol="0" anchor="ctr"/>
           <a:lstStyle/>
           <a:p>
-            <a:pPr indent="0" marL="0">
+            <a:pPr marL="0" indent="0">
               <a:lnSpc>
                 <a:spcPct val="105000"/>
               </a:lnSpc>
@@ -3949,11 +3893,11 @@
           <a:bodyPr wrap="square" lIns="0" tIns="0" rIns="0" bIns="0" rtlCol="0" anchor="ctr"/>
           <a:lstStyle/>
           <a:p>
-            <a:pPr indent="0" marL="0">
-              <a:buNone/>
-            </a:pPr>
-            <a:r>
-              <a:rPr lang="en-US" sz="1000" b="1" spc="300" kern="0" dirty="0">
+            <a:pPr marL="0" indent="0">
+              <a:buNone/>
+            </a:pPr>
+            <a:r>
+              <a:rPr lang="en-US" sz="1000" b="1" kern="0" spc="300" dirty="0">
                 <a:solidFill>
                   <a:srgbClr val="8C8279"/>
                 </a:solidFill>
@@ -3988,7 +3932,7 @@
           <a:bodyPr wrap="square" rtlCol="0" anchor="ctr"/>
           <a:lstStyle/>
           <a:p>
-            <a:pPr algn="r" indent="0" marL="0">
+            <a:pPr marL="0" indent="0" algn="r">
               <a:buNone/>
             </a:pPr>
             <a:r>
@@ -4022,6 +3966,7 @@
         <a:solidFill>
           <a:srgbClr val="FBF6EE"/>
         </a:solidFill>
+        <a:effectLst/>
       </p:bgPr>
     </p:bg>
     <p:spTree>
@@ -4059,7 +4004,7 @@
           <a:bodyPr wrap="square" lIns="0" tIns="0" rIns="0" bIns="0" rtlCol="0" anchor="ctr"/>
           <a:lstStyle/>
           <a:p>
-            <a:pPr indent="0" marL="0">
+            <a:pPr marL="0" indent="0">
               <a:buNone/>
             </a:pPr>
             <a:r>
@@ -4098,13 +4043,20 @@
           </a:solidFill>
           <a:ln/>
           <a:effectLst>
-            <a:outerShdw sx="100000" sy="100000" kx="0" ky="0" algn="bl" rotWithShape="0" blurRad="114300" dist="38100" dir="5400000">
+            <a:outerShdw blurRad="114300" dist="38100" dir="5400000" algn="bl" rotWithShape="0">
               <a:srgbClr val="C9BEAF">
                 <a:alpha val="30000"/>
               </a:srgbClr>
             </a:outerShdw>
           </a:effectLst>
         </p:spPr>
+        <p:txBody>
+          <a:bodyPr/>
+          <a:lstStyle/>
+          <a:p>
+            <a:endParaRPr lang="es-ES"/>
+          </a:p>
+        </p:txBody>
       </p:sp>
       <p:sp>
         <p:nvSpPr>
@@ -4125,6 +4077,13 @@
           </a:solidFill>
           <a:ln/>
         </p:spPr>
+        <p:txBody>
+          <a:bodyPr/>
+          <a:lstStyle/>
+          <a:p>
+            <a:endParaRPr lang="es-ES"/>
+          </a:p>
+        </p:txBody>
       </p:sp>
       <p:sp>
         <p:nvSpPr>
@@ -4147,7 +4106,7 @@
           <a:bodyPr wrap="square" lIns="0" tIns="0" rIns="0" bIns="0" rtlCol="0" anchor="ctr"/>
           <a:lstStyle/>
           <a:p>
-            <a:pPr indent="0" marL="0">
+            <a:pPr marL="0" indent="0">
               <a:buNone/>
             </a:pPr>
             <a:r>
@@ -4186,7 +4145,7 @@
           <a:bodyPr wrap="square" lIns="0" tIns="0" rIns="0" bIns="0" rtlCol="0" anchor="ctr"/>
           <a:lstStyle/>
           <a:p>
-            <a:pPr indent="0" marL="0">
+            <a:pPr marL="0" indent="0">
               <a:lnSpc>
                 <a:spcPct val="105000"/>
               </a:lnSpc>
@@ -4228,13 +4187,20 @@
           </a:solidFill>
           <a:ln/>
           <a:effectLst>
-            <a:outerShdw sx="100000" sy="100000" kx="0" ky="0" algn="bl" rotWithShape="0" blurRad="114300" dist="38100" dir="5400000">
+            <a:outerShdw blurRad="114300" dist="38100" dir="5400000" algn="bl" rotWithShape="0">
               <a:srgbClr val="C9BEAF">
                 <a:alpha val="30000"/>
               </a:srgbClr>
             </a:outerShdw>
           </a:effectLst>
         </p:spPr>
+        <p:txBody>
+          <a:bodyPr/>
+          <a:lstStyle/>
+          <a:p>
+            <a:endParaRPr lang="es-ES"/>
+          </a:p>
+        </p:txBody>
       </p:sp>
       <p:sp>
         <p:nvSpPr>
@@ -4255,6 +4221,13 @@
           </a:solidFill>
           <a:ln/>
         </p:spPr>
+        <p:txBody>
+          <a:bodyPr/>
+          <a:lstStyle/>
+          <a:p>
+            <a:endParaRPr lang="es-ES"/>
+          </a:p>
+        </p:txBody>
       </p:sp>
       <p:sp>
         <p:nvSpPr>
@@ -4277,7 +4250,7 @@
           <a:bodyPr wrap="square" lIns="0" tIns="0" rIns="0" bIns="0" rtlCol="0" anchor="ctr"/>
           <a:lstStyle/>
           <a:p>
-            <a:pPr indent="0" marL="0">
+            <a:pPr marL="0" indent="0">
               <a:buNone/>
             </a:pPr>
             <a:r>
@@ -4316,7 +4289,7 @@
           <a:bodyPr wrap="square" lIns="0" tIns="0" rIns="0" bIns="0" rtlCol="0" anchor="ctr"/>
           <a:lstStyle/>
           <a:p>
-            <a:pPr indent="0" marL="0">
+            <a:pPr marL="0" indent="0">
               <a:lnSpc>
                 <a:spcPct val="105000"/>
               </a:lnSpc>
@@ -4358,13 +4331,20 @@
           </a:solidFill>
           <a:ln/>
           <a:effectLst>
-            <a:outerShdw sx="100000" sy="100000" kx="0" ky="0" algn="bl" rotWithShape="0" blurRad="114300" dist="38100" dir="5400000">
+            <a:outerShdw blurRad="114300" dist="38100" dir="5400000" algn="bl" rotWithShape="0">
               <a:srgbClr val="C9BEAF">
                 <a:alpha val="30000"/>
               </a:srgbClr>
             </a:outerShdw>
           </a:effectLst>
         </p:spPr>
+        <p:txBody>
+          <a:bodyPr/>
+          <a:lstStyle/>
+          <a:p>
+            <a:endParaRPr lang="es-ES"/>
+          </a:p>
+        </p:txBody>
       </p:sp>
       <p:sp>
         <p:nvSpPr>
@@ -4385,6 +4365,13 @@
           </a:solidFill>
           <a:ln/>
         </p:spPr>
+        <p:txBody>
+          <a:bodyPr/>
+          <a:lstStyle/>
+          <a:p>
+            <a:endParaRPr lang="es-ES"/>
+          </a:p>
+        </p:txBody>
       </p:sp>
       <p:sp>
         <p:nvSpPr>
@@ -4407,7 +4394,7 @@
           <a:bodyPr wrap="square" lIns="0" tIns="0" rIns="0" bIns="0" rtlCol="0" anchor="ctr"/>
           <a:lstStyle/>
           <a:p>
-            <a:pPr indent="0" marL="0">
+            <a:pPr marL="0" indent="0">
               <a:buNone/>
             </a:pPr>
             <a:r>
@@ -4446,7 +4433,7 @@
           <a:bodyPr wrap="square" lIns="0" tIns="0" rIns="0" bIns="0" rtlCol="0" anchor="ctr"/>
           <a:lstStyle/>
           <a:p>
-            <a:pPr indent="0" marL="0">
+            <a:pPr marL="0" indent="0">
               <a:lnSpc>
                 <a:spcPct val="105000"/>
               </a:lnSpc>
@@ -4488,6 +4475,13 @@
           </a:solidFill>
           <a:ln/>
         </p:spPr>
+        <p:txBody>
+          <a:bodyPr/>
+          <a:lstStyle/>
+          <a:p>
+            <a:endParaRPr lang="es-ES"/>
+          </a:p>
+        </p:txBody>
       </p:sp>
       <p:sp>
         <p:nvSpPr>
@@ -4510,7 +4504,7 @@
           <a:bodyPr wrap="square" lIns="0" tIns="0" rIns="0" bIns="0" rtlCol="0" anchor="ctr"/>
           <a:lstStyle/>
           <a:p>
-            <a:pPr indent="0" marL="0">
+            <a:pPr marL="0" indent="0">
               <a:buNone/>
             </a:pPr>
             <a:r>
@@ -4549,7 +4543,7 @@
           <a:bodyPr wrap="square" lIns="0" tIns="0" rIns="0" bIns="0" rtlCol="0" anchor="ctr"/>
           <a:lstStyle/>
           <a:p>
-            <a:pPr indent="0" marL="0">
+            <a:pPr marL="0" indent="0">
               <a:lnSpc>
                 <a:spcPct val="115000"/>
               </a:lnSpc>
@@ -4591,11 +4585,11 @@
           <a:bodyPr wrap="square" lIns="0" tIns="0" rIns="0" bIns="0" rtlCol="0" anchor="ctr"/>
           <a:lstStyle/>
           <a:p>
-            <a:pPr indent="0" marL="0">
-              <a:buNone/>
-            </a:pPr>
-            <a:r>
-              <a:rPr lang="en-US" sz="1000" b="1" spc="300" kern="0" dirty="0">
+            <a:pPr marL="0" indent="0">
+              <a:buNone/>
+            </a:pPr>
+            <a:r>
+              <a:rPr lang="en-US" sz="1000" b="1" kern="0" spc="300" dirty="0">
                 <a:solidFill>
                   <a:srgbClr val="8C8279"/>
                 </a:solidFill>
@@ -4630,7 +4624,7 @@
           <a:bodyPr wrap="square" rtlCol="0" anchor="ctr"/>
           <a:lstStyle/>
           <a:p>
-            <a:pPr algn="r" indent="0" marL="0">
+            <a:pPr marL="0" indent="0" algn="r">
               <a:buNone/>
             </a:pPr>
             <a:r>
@@ -4664,6 +4658,7 @@
         <a:solidFill>
           <a:srgbClr val="FBF6EE"/>
         </a:solidFill>
+        <a:effectLst/>
       </p:bgPr>
     </p:bg>
     <p:spTree>
@@ -4701,7 +4696,7 @@
           <a:bodyPr wrap="square" lIns="0" tIns="0" rIns="0" bIns="0" rtlCol="0" anchor="ctr"/>
           <a:lstStyle/>
           <a:p>
-            <a:pPr indent="0" marL="0">
+            <a:pPr marL="0" indent="0">
               <a:buNone/>
             </a:pPr>
             <a:r>
@@ -4740,13 +4735,20 @@
           </a:solidFill>
           <a:ln/>
           <a:effectLst>
-            <a:outerShdw sx="100000" sy="100000" kx="0" ky="0" algn="bl" rotWithShape="0" blurRad="114300" dist="38100" dir="5400000">
+            <a:outerShdw blurRad="114300" dist="38100" dir="5400000" algn="bl" rotWithShape="0">
               <a:srgbClr val="C9BEAF">
                 <a:alpha val="30000"/>
               </a:srgbClr>
             </a:outerShdw>
           </a:effectLst>
         </p:spPr>
+        <p:txBody>
+          <a:bodyPr/>
+          <a:lstStyle/>
+          <a:p>
+            <a:endParaRPr lang="es-ES"/>
+          </a:p>
+        </p:txBody>
       </p:sp>
       <p:sp>
         <p:nvSpPr>
@@ -4767,6 +4769,13 @@
           </a:solidFill>
           <a:ln/>
         </p:spPr>
+        <p:txBody>
+          <a:bodyPr/>
+          <a:lstStyle/>
+          <a:p>
+            <a:endParaRPr lang="es-ES"/>
+          </a:p>
+        </p:txBody>
       </p:sp>
       <p:sp>
         <p:nvSpPr>
@@ -4789,7 +4798,7 @@
           <a:bodyPr wrap="square" lIns="0" tIns="0" rIns="0" bIns="0" rtlCol="0" anchor="ctr"/>
           <a:lstStyle/>
           <a:p>
-            <a:pPr indent="0" marL="0">
+            <a:pPr marL="0" indent="0">
               <a:buNone/>
             </a:pPr>
             <a:r>
@@ -4828,7 +4837,7 @@
           <a:bodyPr wrap="square" lIns="0" tIns="0" rIns="0" bIns="0" rtlCol="0" anchor="ctr"/>
           <a:lstStyle/>
           <a:p>
-            <a:pPr indent="0" marL="0">
+            <a:pPr marL="0" indent="0">
               <a:lnSpc>
                 <a:spcPct val="108000"/>
               </a:lnSpc>
@@ -4870,13 +4879,20 @@
           </a:solidFill>
           <a:ln/>
           <a:effectLst>
-            <a:outerShdw sx="100000" sy="100000" kx="0" ky="0" algn="bl" rotWithShape="0" blurRad="114300" dist="38100" dir="5400000">
+            <a:outerShdw blurRad="114300" dist="38100" dir="5400000" algn="bl" rotWithShape="0">
               <a:srgbClr val="C9BEAF">
                 <a:alpha val="30000"/>
               </a:srgbClr>
             </a:outerShdw>
           </a:effectLst>
         </p:spPr>
+        <p:txBody>
+          <a:bodyPr/>
+          <a:lstStyle/>
+          <a:p>
+            <a:endParaRPr lang="es-ES"/>
+          </a:p>
+        </p:txBody>
       </p:sp>
       <p:sp>
         <p:nvSpPr>
@@ -4897,6 +4913,13 @@
           </a:solidFill>
           <a:ln/>
         </p:spPr>
+        <p:txBody>
+          <a:bodyPr/>
+          <a:lstStyle/>
+          <a:p>
+            <a:endParaRPr lang="es-ES"/>
+          </a:p>
+        </p:txBody>
       </p:sp>
       <p:sp>
         <p:nvSpPr>
@@ -4919,7 +4942,7 @@
           <a:bodyPr wrap="square" lIns="0" tIns="0" rIns="0" bIns="0" rtlCol="0" anchor="ctr"/>
           <a:lstStyle/>
           <a:p>
-            <a:pPr indent="0" marL="0">
+            <a:pPr marL="0" indent="0">
               <a:buNone/>
             </a:pPr>
             <a:r>
@@ -4958,7 +4981,7 @@
           <a:bodyPr wrap="square" lIns="0" tIns="0" rIns="0" bIns="0" rtlCol="0" anchor="ctr"/>
           <a:lstStyle/>
           <a:p>
-            <a:pPr indent="0" marL="0">
+            <a:pPr marL="0" indent="0">
               <a:lnSpc>
                 <a:spcPct val="108000"/>
               </a:lnSpc>
@@ -5000,13 +5023,20 @@
           </a:solidFill>
           <a:ln/>
           <a:effectLst>
-            <a:outerShdw sx="100000" sy="100000" kx="0" ky="0" algn="bl" rotWithShape="0" blurRad="114300" dist="38100" dir="5400000">
+            <a:outerShdw blurRad="114300" dist="38100" dir="5400000" algn="bl" rotWithShape="0">
               <a:srgbClr val="C9BEAF">
                 <a:alpha val="30000"/>
               </a:srgbClr>
             </a:outerShdw>
           </a:effectLst>
         </p:spPr>
+        <p:txBody>
+          <a:bodyPr/>
+          <a:lstStyle/>
+          <a:p>
+            <a:endParaRPr lang="es-ES"/>
+          </a:p>
+        </p:txBody>
       </p:sp>
       <p:sp>
         <p:nvSpPr>
@@ -5027,6 +5057,13 @@
           </a:solidFill>
           <a:ln/>
         </p:spPr>
+        <p:txBody>
+          <a:bodyPr/>
+          <a:lstStyle/>
+          <a:p>
+            <a:endParaRPr lang="es-ES"/>
+          </a:p>
+        </p:txBody>
       </p:sp>
       <p:sp>
         <p:nvSpPr>
@@ -5049,7 +5086,7 @@
           <a:bodyPr wrap="square" lIns="0" tIns="0" rIns="0" bIns="0" rtlCol="0" anchor="ctr"/>
           <a:lstStyle/>
           <a:p>
-            <a:pPr indent="0" marL="0">
+            <a:pPr marL="0" indent="0">
               <a:buNone/>
             </a:pPr>
             <a:r>
@@ -5088,7 +5125,7 @@
           <a:bodyPr wrap="square" lIns="0" tIns="0" rIns="0" bIns="0" rtlCol="0" anchor="ctr"/>
           <a:lstStyle/>
           <a:p>
-            <a:pPr indent="0" marL="0">
+            <a:pPr marL="0" indent="0">
               <a:lnSpc>
                 <a:spcPct val="108000"/>
               </a:lnSpc>
@@ -5130,11 +5167,11 @@
           <a:bodyPr wrap="square" lIns="0" tIns="0" rIns="0" bIns="0" rtlCol="0" anchor="ctr"/>
           <a:lstStyle/>
           <a:p>
-            <a:pPr indent="0" marL="0">
-              <a:buNone/>
-            </a:pPr>
-            <a:r>
-              <a:rPr lang="en-US" sz="1000" b="1" spc="300" kern="0" dirty="0">
+            <a:pPr marL="0" indent="0">
+              <a:buNone/>
+            </a:pPr>
+            <a:r>
+              <a:rPr lang="en-US" sz="1000" b="1" kern="0" spc="300" dirty="0">
                 <a:solidFill>
                   <a:srgbClr val="8C8279"/>
                 </a:solidFill>
@@ -5169,7 +5206,7 @@
           <a:bodyPr wrap="square" rtlCol="0" anchor="ctr"/>
           <a:lstStyle/>
           <a:p>
-            <a:pPr algn="r" indent="0" marL="0">
+            <a:pPr marL="0" indent="0" algn="r">
               <a:buNone/>
             </a:pPr>
             <a:r>
@@ -5203,6 +5240,7 @@
         <a:solidFill>
           <a:srgbClr val="2A2432"/>
         </a:solidFill>
+        <a:effectLst/>
       </p:bgPr>
     </p:bg>
     <p:spTree>
@@ -5240,7 +5278,7 @@
           <a:bodyPr wrap="square" lIns="0" tIns="0" rIns="0" bIns="0" rtlCol="0" anchor="ctr"/>
           <a:lstStyle/>
           <a:p>
-            <a:pPr indent="0" marL="0">
+            <a:pPr marL="0" indent="0">
               <a:buNone/>
             </a:pPr>
             <a:r>
@@ -5279,7 +5317,7 @@
           <a:bodyPr wrap="square" lIns="0" tIns="0" rIns="0" bIns="0" rtlCol="0" anchor="ctr"/>
           <a:lstStyle/>
           <a:p>
-            <a:pPr indent="0" marL="0">
+            <a:pPr marL="0" indent="0">
               <a:buNone/>
             </a:pPr>
             <a:r>
@@ -5318,7 +5356,7 @@
           <a:bodyPr wrap="square" lIns="0" tIns="0" rIns="0" bIns="0" rtlCol="0" anchor="ctr"/>
           <a:lstStyle/>
           <a:p>
-            <a:pPr indent="0" marL="0">
+            <a:pPr marL="0" indent="0">
               <a:lnSpc>
                 <a:spcPct val="115000"/>
               </a:lnSpc>
@@ -5360,6 +5398,13 @@
           </a:solidFill>
           <a:ln/>
         </p:spPr>
+        <p:txBody>
+          <a:bodyPr/>
+          <a:lstStyle/>
+          <a:p>
+            <a:endParaRPr lang="es-ES"/>
+          </a:p>
+        </p:txBody>
       </p:sp>
       <p:sp>
         <p:nvSpPr>
@@ -5382,7 +5427,7 @@
           <a:bodyPr wrap="square" lIns="0" tIns="0" rIns="0" bIns="0" rtlCol="0" anchor="ctr"/>
           <a:lstStyle/>
           <a:p>
-            <a:pPr indent="0" marL="0">
+            <a:pPr marL="0" indent="0">
               <a:buNone/>
             </a:pPr>
             <a:r>
@@ -5396,9 +5441,6 @@
               </a:rPr>
               <a:t>Convertir tiempo de espera en tiempo de vida — </a:t>
             </a:r>
-            <a:pPr indent="0" marL="0">
-              <a:buNone/>
-            </a:pPr>
             <a:r>
               <a:rPr lang="en-US" sz="2000" b="1" i="1" dirty="0">
                 <a:solidFill>
@@ -5435,11 +5477,11 @@
           <a:bodyPr wrap="square" lIns="0" tIns="0" rIns="0" bIns="0" rtlCol="0" anchor="ctr"/>
           <a:lstStyle/>
           <a:p>
-            <a:pPr indent="0" marL="0">
-              <a:buNone/>
-            </a:pPr>
-            <a:r>
-              <a:rPr lang="en-US" sz="1000" b="1" spc="300" kern="0" dirty="0">
+            <a:pPr marL="0" indent="0">
+              <a:buNone/>
+            </a:pPr>
+            <a:r>
+              <a:rPr lang="en-US" sz="1000" b="1" kern="0" spc="300" dirty="0">
                 <a:solidFill>
                   <a:srgbClr val="9C93A6"/>
                 </a:solidFill>
@@ -5474,7 +5516,7 @@
           <a:bodyPr wrap="square" rtlCol="0" anchor="ctr"/>
           <a:lstStyle/>
           <a:p>
-            <a:pPr algn="r" indent="0" marL="0">
+            <a:pPr marL="0" indent="0" algn="r">
               <a:buNone/>
             </a:pPr>
             <a:r>
@@ -5793,4 +5835,319 @@
     </a:ext>
   </a:extLst>
 </a:theme>
+</file>
+
+<file path=ppt/theme/theme2.xml><?xml version="1.0" encoding="utf-8"?>
+<a:theme xmlns:a="http://schemas.openxmlformats.org/drawingml/2006/main" name="Tema de Office">
+  <a:themeElements>
+    <a:clrScheme name="Office">
+      <a:dk1>
+        <a:sysClr val="windowText" lastClr="000000"/>
+      </a:dk1>
+      <a:lt1>
+        <a:sysClr val="window" lastClr="FFFFFF"/>
+      </a:lt1>
+      <a:dk2>
+        <a:srgbClr val="0E2841"/>
+      </a:dk2>
+      <a:lt2>
+        <a:srgbClr val="E8E8E8"/>
+      </a:lt2>
+      <a:accent1>
+        <a:srgbClr val="156082"/>
+      </a:accent1>
+      <a:accent2>
+        <a:srgbClr val="E97132"/>
+      </a:accent2>
+      <a:accent3>
+        <a:srgbClr val="196B24"/>
+      </a:accent3>
+      <a:accent4>
+        <a:srgbClr val="0F9ED5"/>
+      </a:accent4>
+      <a:accent5>
+        <a:srgbClr val="A02B93"/>
+      </a:accent5>
+      <a:accent6>
+        <a:srgbClr val="4EA72E"/>
+      </a:accent6>
+      <a:hlink>
+        <a:srgbClr val="467886"/>
+      </a:hlink>
+      <a:folHlink>
+        <a:srgbClr val="96607D"/>
+      </a:folHlink>
+    </a:clrScheme>
+    <a:fontScheme name="Office">
+      <a:majorFont>
+        <a:latin typeface="Aptos Display" panose="02110004020202020204"/>
+        <a:ea typeface=""/>
+        <a:cs typeface=""/>
+        <a:font script="Jpan" typeface="游ゴシック Light"/>
+        <a:font script="Hang" typeface="맑은 고딕"/>
+        <a:font script="Hans" typeface="等线 Light"/>
+        <a:font script="Hant" typeface="新細明體"/>
+        <a:font script="Arab" typeface="Times New Roman"/>
+        <a:font script="Hebr" typeface="Times New Roman"/>
+        <a:font script="Thai" typeface="Angsana New"/>
+        <a:font script="Ethi" typeface="Nyala"/>
+        <a:font script="Beng" typeface="Vrinda"/>
+        <a:font script="Gujr" typeface="Shruti"/>
+        <a:font script="Khmr" typeface="MoolBoran"/>
+        <a:font script="Knda" typeface="Tunga"/>
+        <a:font script="Guru" typeface="Raavi"/>
+        <a:font script="Cans" typeface="Euphemia"/>
+        <a:font script="Cher" typeface="Plantagenet Cherokee"/>
+        <a:font script="Yiii" typeface="Microsoft Yi Baiti"/>
+        <a:font script="Tibt" typeface="Microsoft Himalaya"/>
+        <a:font script="Thaa" typeface="MV Boli"/>
+        <a:font script="Deva" typeface="Mangal"/>
+        <a:font script="Telu" typeface="Gautami"/>
+        <a:font script="Taml" typeface="Latha"/>
+        <a:font script="Syrc" typeface="Estrangelo Edessa"/>
+        <a:font script="Orya" typeface="Kalinga"/>
+        <a:font script="Mlym" typeface="Kartika"/>
+        <a:font script="Laoo" typeface="DokChampa"/>
+        <a:font script="Sinh" typeface="Iskoola Pota"/>
+        <a:font script="Mong" typeface="Mongolian Baiti"/>
+        <a:font script="Viet" typeface="Times New Roman"/>
+        <a:font script="Uigh" typeface="Microsoft Uighur"/>
+        <a:font script="Geor" typeface="Sylfaen"/>
+        <a:font script="Armn" typeface="Arial"/>
+        <a:font script="Bugi" typeface="Leelawadee UI"/>
+        <a:font script="Bopo" typeface="Microsoft JhengHei"/>
+        <a:font script="Java" typeface="Javanese Text"/>
+        <a:font script="Lisu" typeface="Segoe UI"/>
+        <a:font script="Mymr" typeface="Myanmar Text"/>
+        <a:font script="Nkoo" typeface="Ebrima"/>
+        <a:font script="Olck" typeface="Nirmala UI"/>
+        <a:font script="Osma" typeface="Ebrima"/>
+        <a:font script="Phag" typeface="Phagspa"/>
+        <a:font script="Syrn" typeface="Estrangelo Edessa"/>
+        <a:font script="Syrj" typeface="Estrangelo Edessa"/>
+        <a:font script="Syre" typeface="Estrangelo Edessa"/>
+        <a:font script="Sora" typeface="Nirmala UI"/>
+        <a:font script="Tale" typeface="Microsoft Tai Le"/>
+        <a:font script="Talu" typeface="Microsoft New Tai Lue"/>
+        <a:font script="Tfng" typeface="Ebrima"/>
+      </a:majorFont>
+      <a:minorFont>
+        <a:latin typeface="Aptos" panose="02110004020202020204"/>
+        <a:ea typeface=""/>
+        <a:cs typeface=""/>
+        <a:font script="Jpan" typeface="游ゴシック"/>
+        <a:font script="Hang" typeface="맑은 고딕"/>
+        <a:font script="Hans" typeface="等线"/>
+        <a:font script="Hant" typeface="新細明體"/>
+        <a:font script="Arab" typeface="Arial"/>
+        <a:font script="Hebr" typeface="Arial"/>
+        <a:font script="Thai" typeface="Cordia New"/>
+        <a:font script="Ethi" typeface="Nyala"/>
+        <a:font script="Beng" typeface="Vrinda"/>
+        <a:font script="Gujr" typeface="Shruti"/>
+        <a:font script="Khmr" typeface="DaunPenh"/>
+        <a:font script="Knda" typeface="Tunga"/>
+        <a:font script="Guru" typeface="Raavi"/>
+        <a:font script="Cans" typeface="Euphemia"/>
+        <a:font script="Cher" typeface="Plantagenet Cherokee"/>
+        <a:font script="Yiii" typeface="Microsoft Yi Baiti"/>
+        <a:font script="Tibt" typeface="Microsoft Himalaya"/>
+        <a:font script="Thaa" typeface="MV Boli"/>
+        <a:font script="Deva" typeface="Mangal"/>
+        <a:font script="Telu" typeface="Gautami"/>
+        <a:font script="Taml" typeface="Latha"/>
+        <a:font script="Syrc" typeface="Estrangelo Edessa"/>
+        <a:font script="Orya" typeface="Kalinga"/>
+        <a:font script="Mlym" typeface="Kartika"/>
+        <a:font script="Laoo" typeface="DokChampa"/>
+        <a:font script="Sinh" typeface="Iskoola Pota"/>
+        <a:font script="Mong" typeface="Mongolian Baiti"/>
+        <a:font script="Viet" typeface="Arial"/>
+        <a:font script="Uigh" typeface="Microsoft Uighur"/>
+        <a:font script="Geor" typeface="Sylfaen"/>
+        <a:font script="Armn" typeface="Arial"/>
+        <a:font script="Bugi" typeface="Leelawadee UI"/>
+        <a:font script="Bopo" typeface="Microsoft JhengHei"/>
+        <a:font script="Java" typeface="Javanese Text"/>
+        <a:font script="Lisu" typeface="Segoe UI"/>
+        <a:font script="Mymr" typeface="Myanmar Text"/>
+        <a:font script="Nkoo" typeface="Ebrima"/>
+        <a:font script="Olck" typeface="Nirmala UI"/>
+        <a:font script="Osma" typeface="Ebrima"/>
+        <a:font script="Phag" typeface="Phagspa"/>
+        <a:font script="Syrn" typeface="Estrangelo Edessa"/>
+        <a:font script="Syrj" typeface="Estrangelo Edessa"/>
+        <a:font script="Syre" typeface="Estrangelo Edessa"/>
+        <a:font script="Sora" typeface="Nirmala UI"/>
+        <a:font script="Tale" typeface="Microsoft Tai Le"/>
+        <a:font script="Talu" typeface="Microsoft New Tai Lue"/>
+        <a:font script="Tfng" typeface="Ebrima"/>
+      </a:minorFont>
+    </a:fontScheme>
+    <a:fmtScheme name="Office">
+      <a:fillStyleLst>
+        <a:solidFill>
+          <a:schemeClr val="phClr"/>
+        </a:solidFill>
+        <a:gradFill rotWithShape="1">
+          <a:gsLst>
+            <a:gs pos="0">
+              <a:schemeClr val="phClr">
+                <a:lumMod val="110000"/>
+                <a:satMod val="105000"/>
+                <a:tint val="67000"/>
+              </a:schemeClr>
+            </a:gs>
+            <a:gs pos="50000">
+              <a:schemeClr val="phClr">
+                <a:lumMod val="105000"/>
+                <a:satMod val="103000"/>
+                <a:tint val="73000"/>
+              </a:schemeClr>
+            </a:gs>
+            <a:gs pos="100000">
+              <a:schemeClr val="phClr">
+                <a:lumMod val="105000"/>
+                <a:satMod val="109000"/>
+                <a:tint val="81000"/>
+              </a:schemeClr>
+            </a:gs>
+          </a:gsLst>
+          <a:lin ang="5400000" scaled="0"/>
+        </a:gradFill>
+        <a:gradFill rotWithShape="1">
+          <a:gsLst>
+            <a:gs pos="0">
+              <a:schemeClr val="phClr">
+                <a:satMod val="103000"/>
+                <a:lumMod val="102000"/>
+                <a:tint val="94000"/>
+              </a:schemeClr>
+            </a:gs>
+            <a:gs pos="50000">
+              <a:schemeClr val="phClr">
+                <a:satMod val="110000"/>
+                <a:lumMod val="100000"/>
+                <a:shade val="100000"/>
+              </a:schemeClr>
+            </a:gs>
+            <a:gs pos="100000">
+              <a:schemeClr val="phClr">
+                <a:lumMod val="99000"/>
+                <a:satMod val="120000"/>
+                <a:shade val="78000"/>
+              </a:schemeClr>
+            </a:gs>
+          </a:gsLst>
+          <a:lin ang="5400000" scaled="0"/>
+        </a:gradFill>
+      </a:fillStyleLst>
+      <a:lnStyleLst>
+        <a:ln w="12700" cap="flat" cmpd="sng" algn="ctr">
+          <a:solidFill>
+            <a:schemeClr val="phClr"/>
+          </a:solidFill>
+          <a:prstDash val="solid"/>
+          <a:miter lim="800000"/>
+        </a:ln>
+        <a:ln w="19050" cap="flat" cmpd="sng" algn="ctr">
+          <a:solidFill>
+            <a:schemeClr val="phClr"/>
+          </a:solidFill>
+          <a:prstDash val="solid"/>
+          <a:miter lim="800000"/>
+        </a:ln>
+        <a:ln w="25400" cap="flat" cmpd="sng" algn="ctr">
+          <a:solidFill>
+            <a:schemeClr val="phClr"/>
+          </a:solidFill>
+          <a:prstDash val="solid"/>
+          <a:miter lim="800000"/>
+        </a:ln>
+      </a:lnStyleLst>
+      <a:effectStyleLst>
+        <a:effectStyle>
+          <a:effectLst/>
+        </a:effectStyle>
+        <a:effectStyle>
+          <a:effectLst/>
+        </a:effectStyle>
+        <a:effectStyle>
+          <a:effectLst>
+            <a:outerShdw blurRad="57150" dist="19050" dir="5400000" algn="ctr" rotWithShape="0">
+              <a:srgbClr val="000000">
+                <a:alpha val="63000"/>
+              </a:srgbClr>
+            </a:outerShdw>
+          </a:effectLst>
+        </a:effectStyle>
+      </a:effectStyleLst>
+      <a:bgFillStyleLst>
+        <a:solidFill>
+          <a:schemeClr val="phClr"/>
+        </a:solidFill>
+        <a:solidFill>
+          <a:schemeClr val="phClr">
+            <a:tint val="95000"/>
+            <a:satMod val="170000"/>
+          </a:schemeClr>
+        </a:solidFill>
+        <a:gradFill rotWithShape="1">
+          <a:gsLst>
+            <a:gs pos="0">
+              <a:schemeClr val="phClr">
+                <a:tint val="93000"/>
+                <a:satMod val="150000"/>
+                <a:shade val="98000"/>
+                <a:lumMod val="102000"/>
+              </a:schemeClr>
+            </a:gs>
+            <a:gs pos="50000">
+              <a:schemeClr val="phClr">
+                <a:tint val="98000"/>
+                <a:satMod val="130000"/>
+                <a:shade val="90000"/>
+                <a:lumMod val="103000"/>
+              </a:schemeClr>
+            </a:gs>
+            <a:gs pos="100000">
+              <a:schemeClr val="phClr">
+                <a:shade val="63000"/>
+                <a:satMod val="120000"/>
+              </a:schemeClr>
+            </a:gs>
+          </a:gsLst>
+          <a:lin ang="5400000" scaled="0"/>
+        </a:gradFill>
+      </a:bgFillStyleLst>
+    </a:fmtScheme>
+  </a:themeElements>
+  <a:objectDefaults>
+    <a:lnDef>
+      <a:spPr/>
+      <a:bodyPr/>
+      <a:lstStyle/>
+      <a:style>
+        <a:lnRef idx="2">
+          <a:schemeClr val="accent1"/>
+        </a:lnRef>
+        <a:fillRef idx="0">
+          <a:schemeClr val="accent1"/>
+        </a:fillRef>
+        <a:effectRef idx="1">
+          <a:schemeClr val="accent1"/>
+        </a:effectRef>
+        <a:fontRef idx="minor">
+          <a:schemeClr val="tx1"/>
+        </a:fontRef>
+      </a:style>
+    </a:lnDef>
+  </a:objectDefaults>
+  <a:extraClrSchemeLst/>
+  <a:extLst>
+    <a:ext uri="{05A4C25C-085E-4340-85A3-A5531E510DB2}">
+      <thm15:themeFamily xmlns:thm15="http://schemas.microsoft.com/office/thememl/2012/main" name="Office Theme" id="{2E142A2C-CD16-42D6-873A-C26D2A0506FA}" vid="{1BDDFF52-6CD6-40A5-AB3C-68EB2F1E4D0A}"/>
+    </a:ext>
+  </a:extLst>
+</a:theme>
 </file>